--- a/docs/Présentation soutenance.pptx
+++ b/docs/Présentation soutenance.pptx
@@ -1126,7 +1126,7 @@
   <p:cSld>
     <p:spTree>
       <p:nvGrpSpPr>
-        <p:cNvPr id="156" name="Shape 156"/>
+        <p:cNvPr id="157" name="Shape 157"/>
         <p:cNvGrpSpPr/>
         <p:nvPr/>
       </p:nvGrpSpPr>
@@ -1140,7 +1140,7 @@
       </p:grpSpPr>
       <p:sp>
         <p:nvSpPr>
-          <p:cNvPr id="157" name="Google Shape;157;g3f523cd78d4_0_39:notes"/>
+          <p:cNvPr id="158" name="Google Shape;158;g3f523cd78d4_0_39:notes"/>
           <p:cNvSpPr/>
           <p:nvPr>
             <p:ph idx="2" type="sldImg"/>
@@ -1175,7 +1175,7 @@
       </p:sp>
       <p:sp>
         <p:nvSpPr>
-          <p:cNvPr id="158" name="Google Shape;158;g3f523cd78d4_0_39:notes"/>
+          <p:cNvPr id="159" name="Google Shape;159;g3f523cd78d4_0_39:notes"/>
           <p:cNvSpPr txBox="1"/>
           <p:nvPr>
             <p:ph idx="1" type="body"/>
@@ -1225,7 +1225,7 @@
   <p:cSld>
     <p:spTree>
       <p:nvGrpSpPr>
-        <p:cNvPr id="165" name="Shape 165"/>
+        <p:cNvPr id="166" name="Shape 166"/>
         <p:cNvGrpSpPr/>
         <p:nvPr/>
       </p:nvGrpSpPr>
@@ -1239,7 +1239,7 @@
       </p:grpSpPr>
       <p:sp>
         <p:nvSpPr>
-          <p:cNvPr id="166" name="Google Shape;166;gc6f90357f_0_27:notes"/>
+          <p:cNvPr id="167" name="Google Shape;167;gc6f90357f_0_27:notes"/>
           <p:cNvSpPr/>
           <p:nvPr>
             <p:ph idx="2" type="sldImg"/>
@@ -1274,7 +1274,7 @@
       </p:sp>
       <p:sp>
         <p:nvSpPr>
-          <p:cNvPr id="167" name="Google Shape;167;gc6f90357f_0_27:notes"/>
+          <p:cNvPr id="168" name="Google Shape;168;gc6f90357f_0_27:notes"/>
           <p:cNvSpPr txBox="1"/>
           <p:nvPr>
             <p:ph idx="1" type="body"/>
@@ -1324,7 +1324,7 @@
   <p:cSld>
     <p:spTree>
       <p:nvGrpSpPr>
-        <p:cNvPr id="172" name="Shape 172"/>
+        <p:cNvPr id="173" name="Shape 173"/>
         <p:cNvGrpSpPr/>
         <p:nvPr/>
       </p:nvGrpSpPr>
@@ -1338,7 +1338,7 @@
       </p:grpSpPr>
       <p:sp>
         <p:nvSpPr>
-          <p:cNvPr id="173" name="Google Shape;173;gc6f90357f_0_31:notes"/>
+          <p:cNvPr id="174" name="Google Shape;174;gc6f90357f_0_31:notes"/>
           <p:cNvSpPr/>
           <p:nvPr>
             <p:ph idx="2" type="sldImg"/>
@@ -1373,7 +1373,7 @@
       </p:sp>
       <p:sp>
         <p:nvSpPr>
-          <p:cNvPr id="174" name="Google Shape;174;gc6f90357f_0_31:notes"/>
+          <p:cNvPr id="175" name="Google Shape;175;gc6f90357f_0_31:notes"/>
           <p:cNvSpPr txBox="1"/>
           <p:nvPr>
             <p:ph idx="1" type="body"/>
@@ -1423,7 +1423,7 @@
   <p:cSld>
     <p:spTree>
       <p:nvGrpSpPr>
-        <p:cNvPr id="179" name="Shape 179"/>
+        <p:cNvPr id="180" name="Shape 180"/>
         <p:cNvGrpSpPr/>
         <p:nvPr/>
       </p:nvGrpSpPr>
@@ -1437,7 +1437,7 @@
       </p:grpSpPr>
       <p:sp>
         <p:nvSpPr>
-          <p:cNvPr id="180" name="Google Shape;180;gc6f90357f_0_35:notes"/>
+          <p:cNvPr id="181" name="Google Shape;181;gc6f90357f_0_35:notes"/>
           <p:cNvSpPr/>
           <p:nvPr>
             <p:ph idx="2" type="sldImg"/>
@@ -1472,7 +1472,7 @@
       </p:sp>
       <p:sp>
         <p:nvSpPr>
-          <p:cNvPr id="181" name="Google Shape;181;gc6f90357f_0_35:notes"/>
+          <p:cNvPr id="182" name="Google Shape;182;gc6f90357f_0_35:notes"/>
           <p:cNvSpPr txBox="1"/>
           <p:nvPr>
             <p:ph idx="1" type="body"/>
@@ -1522,7 +1522,7 @@
   <p:cSld>
     <p:spTree>
       <p:nvGrpSpPr>
-        <p:cNvPr id="194" name="Shape 194"/>
+        <p:cNvPr id="195" name="Shape 195"/>
         <p:cNvGrpSpPr/>
         <p:nvPr/>
       </p:nvGrpSpPr>
@@ -1536,7 +1536,7 @@
       </p:grpSpPr>
       <p:sp>
         <p:nvSpPr>
-          <p:cNvPr id="195" name="Google Shape;195;g3f512876158_0_47:notes"/>
+          <p:cNvPr id="196" name="Google Shape;196;g3f512876158_0_47:notes"/>
           <p:cNvSpPr/>
           <p:nvPr>
             <p:ph idx="2" type="sldImg"/>
@@ -1571,7 +1571,7 @@
       </p:sp>
       <p:sp>
         <p:nvSpPr>
-          <p:cNvPr id="196" name="Google Shape;196;g3f512876158_0_47:notes"/>
+          <p:cNvPr id="197" name="Google Shape;197;g3f512876158_0_47:notes"/>
           <p:cNvSpPr txBox="1"/>
           <p:nvPr>
             <p:ph idx="1" type="body"/>
@@ -1621,7 +1621,7 @@
   <p:cSld>
     <p:spTree>
       <p:nvGrpSpPr>
-        <p:cNvPr id="202" name="Shape 202"/>
+        <p:cNvPr id="203" name="Shape 203"/>
         <p:cNvGrpSpPr/>
         <p:nvPr/>
       </p:nvGrpSpPr>
@@ -1635,7 +1635,7 @@
       </p:grpSpPr>
       <p:sp>
         <p:nvSpPr>
-          <p:cNvPr id="203" name="Google Shape;203;g3f512876158_0_4:notes"/>
+          <p:cNvPr id="204" name="Google Shape;204;g3f512876158_0_4:notes"/>
           <p:cNvSpPr/>
           <p:nvPr>
             <p:ph idx="2" type="sldImg"/>
@@ -1670,7 +1670,7 @@
       </p:sp>
       <p:sp>
         <p:nvSpPr>
-          <p:cNvPr id="204" name="Google Shape;204;g3f512876158_0_4:notes"/>
+          <p:cNvPr id="205" name="Google Shape;205;g3f512876158_0_4:notes"/>
           <p:cNvSpPr txBox="1"/>
           <p:nvPr>
             <p:ph idx="1" type="body"/>
@@ -1720,7 +1720,7 @@
   <p:cSld>
     <p:spTree>
       <p:nvGrpSpPr>
-        <p:cNvPr id="207" name="Shape 207"/>
+        <p:cNvPr id="208" name="Shape 208"/>
         <p:cNvGrpSpPr/>
         <p:nvPr/>
       </p:nvGrpSpPr>
@@ -1734,7 +1734,7 @@
       </p:grpSpPr>
       <p:sp>
         <p:nvSpPr>
-          <p:cNvPr id="208" name="Google Shape;208;g3f523cd78d4_0_82:notes"/>
+          <p:cNvPr id="209" name="Google Shape;209;g3f523cd78d4_0_82:notes"/>
           <p:cNvSpPr/>
           <p:nvPr>
             <p:ph idx="2" type="sldImg"/>
@@ -1769,7 +1769,7 @@
       </p:sp>
       <p:sp>
         <p:nvSpPr>
-          <p:cNvPr id="209" name="Google Shape;209;g3f523cd78d4_0_82:notes"/>
+          <p:cNvPr id="210" name="Google Shape;210;g3f523cd78d4_0_82:notes"/>
           <p:cNvSpPr txBox="1"/>
           <p:nvPr>
             <p:ph idx="1" type="body"/>
@@ -1918,7 +1918,7 @@
   <p:cSld>
     <p:spTree>
       <p:nvGrpSpPr>
-        <p:cNvPr id="216" name="Shape 216"/>
+        <p:cNvPr id="217" name="Shape 217"/>
         <p:cNvGrpSpPr/>
         <p:nvPr/>
       </p:nvGrpSpPr>
@@ -1932,7 +1932,7 @@
       </p:grpSpPr>
       <p:sp>
         <p:nvSpPr>
-          <p:cNvPr id="217" name="Google Shape;217;g3f59ad5aefb_0_60:notes"/>
+          <p:cNvPr id="218" name="Google Shape;218;g3f59ad5aefb_0_60:notes"/>
           <p:cNvSpPr/>
           <p:nvPr>
             <p:ph idx="2" type="sldImg"/>
@@ -1967,7 +1967,7 @@
       </p:sp>
       <p:sp>
         <p:nvSpPr>
-          <p:cNvPr id="218" name="Google Shape;218;g3f59ad5aefb_0_60:notes"/>
+          <p:cNvPr id="219" name="Google Shape;219;g3f59ad5aefb_0_60:notes"/>
           <p:cNvSpPr txBox="1"/>
           <p:nvPr>
             <p:ph idx="1" type="body"/>
@@ -2017,7 +2017,7 @@
   <p:cSld>
     <p:spTree>
       <p:nvGrpSpPr>
-        <p:cNvPr id="223" name="Shape 223"/>
+        <p:cNvPr id="224" name="Shape 224"/>
         <p:cNvGrpSpPr/>
         <p:nvPr/>
       </p:nvGrpSpPr>
@@ -2031,7 +2031,7 @@
       </p:grpSpPr>
       <p:sp>
         <p:nvSpPr>
-          <p:cNvPr id="224" name="Google Shape;224;g3f3b710c75f_0_27:notes"/>
+          <p:cNvPr id="225" name="Google Shape;225;g3f3b710c75f_0_27:notes"/>
           <p:cNvSpPr/>
           <p:nvPr>
             <p:ph idx="2" type="sldImg"/>
@@ -2066,7 +2066,7 @@
       </p:sp>
       <p:sp>
         <p:nvSpPr>
-          <p:cNvPr id="225" name="Google Shape;225;g3f3b710c75f_0_27:notes"/>
+          <p:cNvPr id="226" name="Google Shape;226;g3f3b710c75f_0_27:notes"/>
           <p:cNvSpPr txBox="1"/>
           <p:nvPr>
             <p:ph idx="1" type="body"/>
@@ -2116,7 +2116,7 @@
   <p:cSld>
     <p:spTree>
       <p:nvGrpSpPr>
-        <p:cNvPr id="230" name="Shape 230"/>
+        <p:cNvPr id="231" name="Shape 231"/>
         <p:cNvGrpSpPr/>
         <p:nvPr/>
       </p:nvGrpSpPr>
@@ -2130,7 +2130,7 @@
       </p:grpSpPr>
       <p:sp>
         <p:nvSpPr>
-          <p:cNvPr id="231" name="Google Shape;231;g3f3b710c75f_0_36:notes"/>
+          <p:cNvPr id="232" name="Google Shape;232;g3f3b710c75f_0_36:notes"/>
           <p:cNvSpPr/>
           <p:nvPr>
             <p:ph idx="2" type="sldImg"/>
@@ -2165,7 +2165,7 @@
       </p:sp>
       <p:sp>
         <p:nvSpPr>
-          <p:cNvPr id="232" name="Google Shape;232;g3f3b710c75f_0_36:notes"/>
+          <p:cNvPr id="233" name="Google Shape;233;g3f3b710c75f_0_36:notes"/>
           <p:cNvSpPr txBox="1"/>
           <p:nvPr>
             <p:ph idx="1" type="body"/>
@@ -2215,7 +2215,7 @@
   <p:cSld>
     <p:spTree>
       <p:nvGrpSpPr>
-        <p:cNvPr id="237" name="Shape 237"/>
+        <p:cNvPr id="238" name="Shape 238"/>
         <p:cNvGrpSpPr/>
         <p:nvPr/>
       </p:nvGrpSpPr>
@@ -2229,7 +2229,7 @@
       </p:grpSpPr>
       <p:sp>
         <p:nvSpPr>
-          <p:cNvPr id="238" name="Google Shape;238;g3f523cd78d4_0_78:notes"/>
+          <p:cNvPr id="239" name="Google Shape;239;g3f523cd78d4_0_78:notes"/>
           <p:cNvSpPr/>
           <p:nvPr>
             <p:ph idx="2" type="sldImg"/>
@@ -2264,7 +2264,7 @@
       </p:sp>
       <p:sp>
         <p:nvSpPr>
-          <p:cNvPr id="239" name="Google Shape;239;g3f523cd78d4_0_78:notes"/>
+          <p:cNvPr id="240" name="Google Shape;240;g3f523cd78d4_0_78:notes"/>
           <p:cNvSpPr txBox="1"/>
           <p:nvPr>
             <p:ph idx="1" type="body"/>
@@ -2314,7 +2314,7 @@
   <p:cSld>
     <p:spTree>
       <p:nvGrpSpPr>
-        <p:cNvPr id="242" name="Shape 242"/>
+        <p:cNvPr id="243" name="Shape 243"/>
         <p:cNvGrpSpPr/>
         <p:nvPr/>
       </p:nvGrpSpPr>
@@ -2328,7 +2328,7 @@
       </p:grpSpPr>
       <p:sp>
         <p:nvSpPr>
-          <p:cNvPr id="243" name="Google Shape;243;g3f512876158_0_65:notes"/>
+          <p:cNvPr id="244" name="Google Shape;244;g3f512876158_0_65:notes"/>
           <p:cNvSpPr/>
           <p:nvPr>
             <p:ph idx="2" type="sldImg"/>
@@ -2363,7 +2363,7 @@
       </p:sp>
       <p:sp>
         <p:nvSpPr>
-          <p:cNvPr id="244" name="Google Shape;244;g3f512876158_0_65:notes"/>
+          <p:cNvPr id="245" name="Google Shape;245;g3f512876158_0_65:notes"/>
           <p:cNvSpPr txBox="1"/>
           <p:nvPr>
             <p:ph idx="1" type="body"/>
@@ -2413,7 +2413,7 @@
   <p:cSld>
     <p:spTree>
       <p:nvGrpSpPr>
-        <p:cNvPr id="250" name="Shape 250"/>
+        <p:cNvPr id="251" name="Shape 251"/>
         <p:cNvGrpSpPr/>
         <p:nvPr/>
       </p:nvGrpSpPr>
@@ -2427,7 +2427,7 @@
       </p:grpSpPr>
       <p:sp>
         <p:nvSpPr>
-          <p:cNvPr id="251" name="Google Shape;251;g3f512876158_0_8:notes"/>
+          <p:cNvPr id="252" name="Google Shape;252;g3f512876158_0_8:notes"/>
           <p:cNvSpPr/>
           <p:nvPr>
             <p:ph idx="2" type="sldImg"/>
@@ -2462,7 +2462,7 @@
       </p:sp>
       <p:sp>
         <p:nvSpPr>
-          <p:cNvPr id="252" name="Google Shape;252;g3f512876158_0_8:notes"/>
+          <p:cNvPr id="253" name="Google Shape;253;g3f512876158_0_8:notes"/>
           <p:cNvSpPr txBox="1"/>
           <p:nvPr>
             <p:ph idx="1" type="body"/>
@@ -2512,7 +2512,7 @@
   <p:cSld>
     <p:spTree>
       <p:nvGrpSpPr>
-        <p:cNvPr id="255" name="Shape 255"/>
+        <p:cNvPr id="256" name="Shape 256"/>
         <p:cNvGrpSpPr/>
         <p:nvPr/>
       </p:nvGrpSpPr>
@@ -2526,7 +2526,7 @@
       </p:grpSpPr>
       <p:sp>
         <p:nvSpPr>
-          <p:cNvPr id="256" name="Google Shape;256;g3f512876158_0_71:notes"/>
+          <p:cNvPr id="257" name="Google Shape;257;g3f512876158_0_71:notes"/>
           <p:cNvSpPr/>
           <p:nvPr>
             <p:ph idx="2" type="sldImg"/>
@@ -2561,7 +2561,7 @@
       </p:sp>
       <p:sp>
         <p:nvSpPr>
-          <p:cNvPr id="257" name="Google Shape;257;g3f512876158_0_71:notes"/>
+          <p:cNvPr id="258" name="Google Shape;258;g3f512876158_0_71:notes"/>
           <p:cNvSpPr txBox="1"/>
           <p:nvPr>
             <p:ph idx="1" type="body"/>
@@ -2611,7 +2611,7 @@
   <p:cSld>
     <p:spTree>
       <p:nvGrpSpPr>
-        <p:cNvPr id="265" name="Shape 265"/>
+        <p:cNvPr id="266" name="Shape 266"/>
         <p:cNvGrpSpPr/>
         <p:nvPr/>
       </p:nvGrpSpPr>
@@ -2625,7 +2625,7 @@
       </p:grpSpPr>
       <p:sp>
         <p:nvSpPr>
-          <p:cNvPr id="266" name="Google Shape;266;g3f512876158_0_12:notes"/>
+          <p:cNvPr id="267" name="Google Shape;267;g3f512876158_0_12:notes"/>
           <p:cNvSpPr/>
           <p:nvPr>
             <p:ph idx="2" type="sldImg"/>
@@ -2660,7 +2660,7 @@
       </p:sp>
       <p:sp>
         <p:nvSpPr>
-          <p:cNvPr id="267" name="Google Shape;267;g3f512876158_0_12:notes"/>
+          <p:cNvPr id="268" name="Google Shape;268;g3f512876158_0_12:notes"/>
           <p:cNvSpPr txBox="1"/>
           <p:nvPr>
             <p:ph idx="1" type="body"/>
@@ -2710,7 +2710,7 @@
   <p:cSld>
     <p:spTree>
       <p:nvGrpSpPr>
-        <p:cNvPr id="270" name="Shape 270"/>
+        <p:cNvPr id="271" name="Shape 271"/>
         <p:cNvGrpSpPr/>
         <p:nvPr/>
       </p:nvGrpSpPr>
@@ -2724,7 +2724,7 @@
       </p:grpSpPr>
       <p:sp>
         <p:nvSpPr>
-          <p:cNvPr id="271" name="Google Shape;271;g3f512876158_0_77:notes"/>
+          <p:cNvPr id="272" name="Google Shape;272;g3f512876158_0_77:notes"/>
           <p:cNvSpPr/>
           <p:nvPr>
             <p:ph idx="2" type="sldImg"/>
@@ -2759,7 +2759,7 @@
       </p:sp>
       <p:sp>
         <p:nvSpPr>
-          <p:cNvPr id="272" name="Google Shape;272;g3f512876158_0_77:notes"/>
+          <p:cNvPr id="273" name="Google Shape;273;g3f512876158_0_77:notes"/>
           <p:cNvSpPr txBox="1"/>
           <p:nvPr>
             <p:ph idx="1" type="body"/>
@@ -2809,7 +2809,7 @@
   <p:cSld>
     <p:spTree>
       <p:nvGrpSpPr>
-        <p:cNvPr id="277" name="Shape 277"/>
+        <p:cNvPr id="278" name="Shape 278"/>
         <p:cNvGrpSpPr/>
         <p:nvPr/>
       </p:nvGrpSpPr>
@@ -2823,7 +2823,7 @@
       </p:grpSpPr>
       <p:sp>
         <p:nvSpPr>
-          <p:cNvPr id="278" name="Google Shape;278;g3f3b710c75f_0_45:notes"/>
+          <p:cNvPr id="279" name="Google Shape;279;g3f3b710c75f_0_45:notes"/>
           <p:cNvSpPr/>
           <p:nvPr>
             <p:ph idx="2" type="sldImg"/>
@@ -2858,7 +2858,7 @@
       </p:sp>
       <p:sp>
         <p:nvSpPr>
-          <p:cNvPr id="279" name="Google Shape;279;g3f3b710c75f_0_45:notes"/>
+          <p:cNvPr id="280" name="Google Shape;280;g3f3b710c75f_0_45:notes"/>
           <p:cNvSpPr txBox="1"/>
           <p:nvPr>
             <p:ph idx="1" type="body"/>
@@ -3007,7 +3007,7 @@
   <p:cSld>
     <p:spTree>
       <p:nvGrpSpPr>
-        <p:cNvPr id="282" name="Shape 282"/>
+        <p:cNvPr id="283" name="Shape 283"/>
         <p:cNvGrpSpPr/>
         <p:nvPr/>
       </p:nvGrpSpPr>
@@ -3021,7 +3021,7 @@
       </p:grpSpPr>
       <p:sp>
         <p:nvSpPr>
-          <p:cNvPr id="283" name="Google Shape;283;g3f3b710c75f_0_49:notes"/>
+          <p:cNvPr id="284" name="Google Shape;284;g3f3b710c75f_0_49:notes"/>
           <p:cNvSpPr/>
           <p:nvPr>
             <p:ph idx="2" type="sldImg"/>
@@ -3056,7 +3056,7 @@
       </p:sp>
       <p:sp>
         <p:nvSpPr>
-          <p:cNvPr id="284" name="Google Shape;284;g3f3b710c75f_0_49:notes"/>
+          <p:cNvPr id="285" name="Google Shape;285;g3f3b710c75f_0_49:notes"/>
           <p:cNvSpPr txBox="1"/>
           <p:nvPr>
             <p:ph idx="1" type="body"/>
@@ -3106,7 +3106,7 @@
   <p:cSld>
     <p:spTree>
       <p:nvGrpSpPr>
-        <p:cNvPr id="289" name="Shape 289"/>
+        <p:cNvPr id="290" name="Shape 290"/>
         <p:cNvGrpSpPr/>
         <p:nvPr/>
       </p:nvGrpSpPr>
@@ -3120,7 +3120,7 @@
       </p:grpSpPr>
       <p:sp>
         <p:nvSpPr>
-          <p:cNvPr id="290" name="Google Shape;290;g3f512876158_0_16:notes"/>
+          <p:cNvPr id="291" name="Google Shape;291;g3f512876158_0_16:notes"/>
           <p:cNvSpPr/>
           <p:nvPr>
             <p:ph idx="2" type="sldImg"/>
@@ -3155,7 +3155,7 @@
       </p:sp>
       <p:sp>
         <p:nvSpPr>
-          <p:cNvPr id="291" name="Google Shape;291;g3f512876158_0_16:notes"/>
+          <p:cNvPr id="292" name="Google Shape;292;g3f512876158_0_16:notes"/>
           <p:cNvSpPr txBox="1"/>
           <p:nvPr>
             <p:ph idx="1" type="body"/>
@@ -3205,7 +3205,7 @@
   <p:cSld>
     <p:spTree>
       <p:nvGrpSpPr>
-        <p:cNvPr id="294" name="Shape 294"/>
+        <p:cNvPr id="295" name="Shape 295"/>
         <p:cNvGrpSpPr/>
         <p:nvPr/>
       </p:nvGrpSpPr>
@@ -3219,7 +3219,7 @@
       </p:grpSpPr>
       <p:sp>
         <p:nvSpPr>
-          <p:cNvPr id="295" name="Google Shape;295;gc6f90357f_0_47:notes"/>
+          <p:cNvPr id="296" name="Google Shape;296;gc6f90357f_0_47:notes"/>
           <p:cNvSpPr/>
           <p:nvPr>
             <p:ph idx="2" type="sldImg"/>
@@ -3254,7 +3254,7 @@
       </p:sp>
       <p:sp>
         <p:nvSpPr>
-          <p:cNvPr id="296" name="Google Shape;296;gc6f90357f_0_47:notes"/>
+          <p:cNvPr id="297" name="Google Shape;297;gc6f90357f_0_47:notes"/>
           <p:cNvSpPr txBox="1"/>
           <p:nvPr>
             <p:ph idx="1" type="body"/>
@@ -11225,81 +11225,6 @@
             </a:r>
             <a:endParaRPr sz="1600"/>
           </a:p>
-          <a:p>
-            <a:pPr indent="-330200" lvl="0" marL="457200" rtl="0" algn="l">
-              <a:spcBef>
-                <a:spcPts val="0"/>
-              </a:spcBef>
-              <a:spcAft>
-                <a:spcPts val="0"/>
-              </a:spcAft>
-              <a:buSzPts val="1600"/>
-              <a:buChar char="●"/>
-            </a:pPr>
-            <a:r>
-              <a:rPr lang="fr" sz="1600"/>
-              <a:t>Echantillonage des donn</a:t>
-            </a:r>
-            <a:r>
-              <a:rPr lang="fr" sz="1600"/>
-              <a:t>ées</a:t>
-            </a:r>
-            <a:endParaRPr sz="1600"/>
-          </a:p>
-          <a:p>
-            <a:pPr indent="-330200" lvl="1" marL="914400" rtl="0" algn="l">
-              <a:spcBef>
-                <a:spcPts val="0"/>
-              </a:spcBef>
-              <a:spcAft>
-                <a:spcPts val="0"/>
-              </a:spcAft>
-              <a:buSzPts val="1600"/>
-              <a:buChar char="○"/>
-            </a:pPr>
-            <a:r>
-              <a:rPr lang="fr" sz="1600"/>
-              <a:t>Choix du pas de r</a:t>
-            </a:r>
-            <a:r>
-              <a:rPr lang="fr" sz="1600"/>
-              <a:t>écupération des données ( </a:t>
-            </a:r>
-            <a:r>
-              <a:rPr b="1" lang="fr" sz="1600"/>
-              <a:t>1h</a:t>
-            </a:r>
-            <a:r>
-              <a:rPr lang="fr" sz="1600"/>
-              <a:t> )</a:t>
-            </a:r>
-            <a:endParaRPr sz="1600"/>
-          </a:p>
-          <a:p>
-            <a:pPr indent="-330200" lvl="0" marL="457200" rtl="0" algn="l">
-              <a:spcBef>
-                <a:spcPts val="0"/>
-              </a:spcBef>
-              <a:spcAft>
-                <a:spcPts val="0"/>
-              </a:spcAft>
-              <a:buSzPts val="1600"/>
-              <a:buChar char="●"/>
-            </a:pPr>
-            <a:r>
-              <a:rPr lang="fr" sz="1600"/>
-              <a:t>Choix de la cible ( prédiction à </a:t>
-            </a:r>
-            <a:r>
-              <a:rPr b="1" lang="fr" sz="1600"/>
-              <a:t>j+1</a:t>
-            </a:r>
-            <a:r>
-              <a:rPr lang="fr" sz="1600"/>
-              <a:t>)</a:t>
-            </a:r>
-            <a:endParaRPr sz="1600"/>
-          </a:p>
         </p:txBody>
       </p:sp>
       <p:cxnSp>
@@ -11328,6 +11253,200 @@
           </a:ln>
         </p:spPr>
       </p:cxnSp>
+      <p:sp>
+        <p:nvSpPr>
+          <p:cNvPr id="156" name="Google Shape;156;p24"/>
+          <p:cNvSpPr txBox="1"/>
+          <p:nvPr/>
+        </p:nvSpPr>
+        <p:spPr>
+          <a:xfrm>
+            <a:off x="2038800" y="3358575"/>
+            <a:ext cx="4196400" cy="1563900"/>
+          </a:xfrm>
+          <a:prstGeom prst="rect">
+            <a:avLst/>
+          </a:prstGeom>
+          <a:noFill/>
+          <a:ln>
+            <a:noFill/>
+          </a:ln>
+        </p:spPr>
+        <p:txBody>
+          <a:bodyPr anchorCtr="0" anchor="t" bIns="91425" lIns="91425" spcFirstLastPara="1" rIns="91425" wrap="square" tIns="91425">
+            <a:spAutoFit/>
+          </a:bodyPr>
+          <a:lstStyle/>
+          <a:p>
+            <a:pPr indent="-330200" lvl="0" marL="457200" rtl="0" algn="l">
+              <a:lnSpc>
+                <a:spcPct val="115000"/>
+              </a:lnSpc>
+              <a:spcBef>
+                <a:spcPts val="0"/>
+              </a:spcBef>
+              <a:spcAft>
+                <a:spcPts val="0"/>
+              </a:spcAft>
+              <a:buClr>
+                <a:schemeClr val="dk1"/>
+              </a:buClr>
+              <a:buSzPts val="1600"/>
+              <a:buFont typeface="Old Standard TT"/>
+              <a:buChar char="●"/>
+            </a:pPr>
+            <a:r>
+              <a:rPr lang="fr" sz="1600">
+                <a:solidFill>
+                  <a:schemeClr val="dk1"/>
+                </a:solidFill>
+                <a:latin typeface="Old Standard TT"/>
+                <a:ea typeface="Old Standard TT"/>
+                <a:cs typeface="Old Standard TT"/>
+                <a:sym typeface="Old Standard TT"/>
+              </a:rPr>
+              <a:t>Echantillonage des données</a:t>
+            </a:r>
+            <a:endParaRPr sz="1600">
+              <a:solidFill>
+                <a:schemeClr val="dk1"/>
+              </a:solidFill>
+              <a:latin typeface="Old Standard TT"/>
+              <a:ea typeface="Old Standard TT"/>
+              <a:cs typeface="Old Standard TT"/>
+              <a:sym typeface="Old Standard TT"/>
+            </a:endParaRPr>
+          </a:p>
+          <a:p>
+            <a:pPr indent="-330200" lvl="1" marL="914400" rtl="0" algn="l">
+              <a:lnSpc>
+                <a:spcPct val="115000"/>
+              </a:lnSpc>
+              <a:spcBef>
+                <a:spcPts val="0"/>
+              </a:spcBef>
+              <a:spcAft>
+                <a:spcPts val="0"/>
+              </a:spcAft>
+              <a:buClr>
+                <a:schemeClr val="dk1"/>
+              </a:buClr>
+              <a:buSzPts val="1600"/>
+              <a:buFont typeface="Old Standard TT"/>
+              <a:buChar char="○"/>
+            </a:pPr>
+            <a:r>
+              <a:rPr lang="fr" sz="1600">
+                <a:solidFill>
+                  <a:schemeClr val="dk1"/>
+                </a:solidFill>
+                <a:latin typeface="Old Standard TT"/>
+                <a:ea typeface="Old Standard TT"/>
+                <a:cs typeface="Old Standard TT"/>
+                <a:sym typeface="Old Standard TT"/>
+              </a:rPr>
+              <a:t>Choix du pas de récupération des données ( </a:t>
+            </a:r>
+            <a:r>
+              <a:rPr b="1" lang="fr" sz="1600">
+                <a:solidFill>
+                  <a:schemeClr val="dk1"/>
+                </a:solidFill>
+                <a:latin typeface="Old Standard TT"/>
+                <a:ea typeface="Old Standard TT"/>
+                <a:cs typeface="Old Standard TT"/>
+                <a:sym typeface="Old Standard TT"/>
+              </a:rPr>
+              <a:t>1h</a:t>
+            </a:r>
+            <a:r>
+              <a:rPr lang="fr" sz="1600">
+                <a:solidFill>
+                  <a:schemeClr val="dk1"/>
+                </a:solidFill>
+                <a:latin typeface="Old Standard TT"/>
+                <a:ea typeface="Old Standard TT"/>
+                <a:cs typeface="Old Standard TT"/>
+                <a:sym typeface="Old Standard TT"/>
+              </a:rPr>
+              <a:t> )</a:t>
+            </a:r>
+            <a:endParaRPr sz="1600">
+              <a:solidFill>
+                <a:schemeClr val="dk1"/>
+              </a:solidFill>
+              <a:latin typeface="Old Standard TT"/>
+              <a:ea typeface="Old Standard TT"/>
+              <a:cs typeface="Old Standard TT"/>
+              <a:sym typeface="Old Standard TT"/>
+            </a:endParaRPr>
+          </a:p>
+          <a:p>
+            <a:pPr indent="-330200" lvl="0" marL="457200" rtl="0" algn="l">
+              <a:lnSpc>
+                <a:spcPct val="115000"/>
+              </a:lnSpc>
+              <a:spcBef>
+                <a:spcPts val="0"/>
+              </a:spcBef>
+              <a:spcAft>
+                <a:spcPts val="0"/>
+              </a:spcAft>
+              <a:buClr>
+                <a:schemeClr val="dk1"/>
+              </a:buClr>
+              <a:buSzPts val="1600"/>
+              <a:buFont typeface="Old Standard TT"/>
+              <a:buChar char="●"/>
+            </a:pPr>
+            <a:r>
+              <a:rPr lang="fr" sz="1600">
+                <a:solidFill>
+                  <a:schemeClr val="dk1"/>
+                </a:solidFill>
+                <a:latin typeface="Old Standard TT"/>
+                <a:ea typeface="Old Standard TT"/>
+                <a:cs typeface="Old Standard TT"/>
+                <a:sym typeface="Old Standard TT"/>
+              </a:rPr>
+              <a:t>Choix de la cible ( prédiction à </a:t>
+            </a:r>
+            <a:r>
+              <a:rPr b="1" lang="fr" sz="1600">
+                <a:solidFill>
+                  <a:schemeClr val="dk1"/>
+                </a:solidFill>
+                <a:latin typeface="Old Standard TT"/>
+                <a:ea typeface="Old Standard TT"/>
+                <a:cs typeface="Old Standard TT"/>
+                <a:sym typeface="Old Standard TT"/>
+              </a:rPr>
+              <a:t>j+1 / 24</a:t>
+            </a:r>
+            <a:r>
+              <a:rPr lang="fr" sz="1600">
+                <a:solidFill>
+                  <a:schemeClr val="dk1"/>
+                </a:solidFill>
+                <a:latin typeface="Old Standard TT"/>
+                <a:ea typeface="Old Standard TT"/>
+                <a:cs typeface="Old Standard TT"/>
+                <a:sym typeface="Old Standard TT"/>
+              </a:rPr>
+              <a:t> points horaire)</a:t>
+            </a:r>
+            <a:endParaRPr sz="1800">
+              <a:solidFill>
+                <a:schemeClr val="dk1"/>
+              </a:solidFill>
+              <a:latin typeface="Old Standard TT"/>
+              <a:ea typeface="Old Standard TT"/>
+              <a:cs typeface="Old Standard TT"/>
+              <a:sym typeface="Old Standard TT"/>
+            </a:endParaRPr>
+          </a:p>
+        </p:txBody>
+      </p:sp>
     </p:spTree>
   </p:cSld>
   <p:clrMapOvr>
@@ -11341,7 +11460,7 @@
   <p:cSld>
     <p:spTree>
       <p:nvGrpSpPr>
-        <p:cNvPr id="159" name="Shape 159"/>
+        <p:cNvPr id="160" name="Shape 160"/>
         <p:cNvGrpSpPr/>
         <p:nvPr/>
       </p:nvGrpSpPr>
@@ -11355,7 +11474,7 @@
       </p:grpSpPr>
       <p:sp>
         <p:nvSpPr>
-          <p:cNvPr id="160" name="Google Shape;160;p25"/>
+          <p:cNvPr id="161" name="Google Shape;161;p25"/>
           <p:cNvSpPr txBox="1"/>
           <p:nvPr>
             <p:ph idx="2" type="body"/>
@@ -11447,65 +11566,6 @@
               <a:t/>
             </a:r>
             <a:endParaRPr sz="1600"/>
-          </a:p>
-        </p:txBody>
-      </p:sp>
-      <p:sp>
-        <p:nvSpPr>
-          <p:cNvPr id="161" name="Google Shape;161;p25"/>
-          <p:cNvSpPr txBox="1"/>
-          <p:nvPr>
-            <p:ph type="title"/>
-          </p:nvPr>
-        </p:nvSpPr>
-        <p:spPr>
-          <a:xfrm>
-            <a:off x="311700" y="445025"/>
-            <a:ext cx="8520600" cy="613200"/>
-          </a:xfrm>
-          <a:prstGeom prst="rect">
-            <a:avLst/>
-          </a:prstGeom>
-        </p:spPr>
-        <p:txBody>
-          <a:bodyPr anchorCtr="0" anchor="t" bIns="91425" lIns="91425" spcFirstLastPara="1" rIns="91425" wrap="square" tIns="91425">
-            <a:noAutofit/>
-          </a:bodyPr>
-          <a:lstStyle/>
-          <a:p>
-            <a:pPr indent="0" lvl="0" marL="0" rtl="0" algn="l">
-              <a:spcBef>
-                <a:spcPts val="0"/>
-              </a:spcBef>
-              <a:spcAft>
-                <a:spcPts val="0"/>
-              </a:spcAft>
-              <a:buNone/>
-            </a:pPr>
-            <a:r>
-              <a:rPr lang="fr"/>
-              <a:t>Choix du mod</a:t>
-            </a:r>
-            <a:r>
-              <a:rPr lang="fr"/>
-              <a:t>èle</a:t>
-            </a:r>
-            <a:endParaRPr/>
-          </a:p>
-          <a:p>
-            <a:pPr indent="0" lvl="0" marL="0" rtl="0" algn="l">
-              <a:spcBef>
-                <a:spcPts val="0"/>
-              </a:spcBef>
-              <a:spcAft>
-                <a:spcPts val="0"/>
-              </a:spcAft>
-              <a:buNone/>
-            </a:pPr>
-            <a:r>
-              <a:t/>
-            </a:r>
-            <a:endParaRPr/>
           </a:p>
         </p:txBody>
       </p:sp>
@@ -11514,13 +11574,13 @@
           <p:cNvPr id="162" name="Google Shape;162;p25"/>
           <p:cNvSpPr txBox="1"/>
           <p:nvPr>
-            <p:ph idx="2" type="body"/>
+            <p:ph type="title"/>
           </p:nvPr>
         </p:nvSpPr>
         <p:spPr>
           <a:xfrm>
-            <a:off x="4311600" y="1251625"/>
-            <a:ext cx="4520700" cy="3397200"/>
+            <a:off x="311700" y="445025"/>
+            <a:ext cx="8520600" cy="613200"/>
           </a:xfrm>
           <a:prstGeom prst="rect">
             <a:avLst/>
@@ -11542,6 +11602,65 @@
               <a:buNone/>
             </a:pPr>
             <a:r>
+              <a:rPr lang="fr"/>
+              <a:t>Choix du mod</a:t>
+            </a:r>
+            <a:r>
+              <a:rPr lang="fr"/>
+              <a:t>èle</a:t>
+            </a:r>
+            <a:endParaRPr/>
+          </a:p>
+          <a:p>
+            <a:pPr indent="0" lvl="0" marL="0" rtl="0" algn="l">
+              <a:spcBef>
+                <a:spcPts val="0"/>
+              </a:spcBef>
+              <a:spcAft>
+                <a:spcPts val="0"/>
+              </a:spcAft>
+              <a:buNone/>
+            </a:pPr>
+            <a:r>
+              <a:t/>
+            </a:r>
+            <a:endParaRPr/>
+          </a:p>
+        </p:txBody>
+      </p:sp>
+      <p:sp>
+        <p:nvSpPr>
+          <p:cNvPr id="163" name="Google Shape;163;p25"/>
+          <p:cNvSpPr txBox="1"/>
+          <p:nvPr>
+            <p:ph idx="2" type="body"/>
+          </p:nvPr>
+        </p:nvSpPr>
+        <p:spPr>
+          <a:xfrm>
+            <a:off x="4311600" y="1251625"/>
+            <a:ext cx="4520700" cy="3397200"/>
+          </a:xfrm>
+          <a:prstGeom prst="rect">
+            <a:avLst/>
+          </a:prstGeom>
+        </p:spPr>
+        <p:txBody>
+          <a:bodyPr anchorCtr="0" anchor="t" bIns="91425" lIns="91425" spcFirstLastPara="1" rIns="91425" wrap="square" tIns="91425">
+            <a:noAutofit/>
+          </a:bodyPr>
+          <a:lstStyle/>
+          <a:p>
+            <a:pPr indent="0" lvl="0" marL="0" rtl="0" algn="l">
+              <a:spcBef>
+                <a:spcPts val="0"/>
+              </a:spcBef>
+              <a:spcAft>
+                <a:spcPts val="0"/>
+              </a:spcAft>
+              <a:buNone/>
+            </a:pPr>
+            <a:r>
               <a:rPr b="1" lang="fr" sz="1800"/>
               <a:t>Score</a:t>
             </a:r>
@@ -11560,7 +11679,7 @@
             </a:pPr>
             <a:r>
               <a:rPr lang="fr" sz="1600"/>
-              <a:t>Faux négatif pas important dans notre contexte</a:t>
+              <a:t>Faux négatif est un moindre mal dans notre contexte</a:t>
             </a:r>
             <a:endParaRPr sz="1600"/>
           </a:p>
@@ -11593,7 +11712,7 @@
       </p:sp>
       <p:graphicFrame>
         <p:nvGraphicFramePr>
-          <p:cNvPr id="163" name="Google Shape;163;p25"/>
+          <p:cNvPr id="164" name="Google Shape;164;p25"/>
           <p:cNvGraphicFramePr/>
           <p:nvPr/>
         </p:nvGraphicFramePr>
@@ -11606,7 +11725,7 @@
             <a:tbl>
               <a:tblPr>
                 <a:noFill/>
-                <a:tableStyleId>{F700B9C9-9B36-457C-98CA-BAEFBE193F8A}</a:tableStyleId>
+                <a:tableStyleId>{F3DA9769-4BB8-4E49-9C5B-E7515FAB5B6F}</a:tableStyleId>
               </a:tblPr>
               <a:tblGrid>
                 <a:gridCol w="3215700"/>
@@ -11902,7 +12021,7 @@
       </p:graphicFrame>
       <p:pic>
         <p:nvPicPr>
-          <p:cNvPr id="164" name="Google Shape;164;p25"/>
+          <p:cNvPr id="165" name="Google Shape;165;p25"/>
           <p:cNvPicPr preferRelativeResize="0"/>
           <p:nvPr/>
         </p:nvPicPr>
@@ -11916,7 +12035,7 @@
         </p:blipFill>
         <p:spPr>
           <a:xfrm>
-            <a:off x="4432775" y="3467401"/>
+            <a:off x="4418200" y="3095851"/>
             <a:ext cx="4446300" cy="1421725"/>
           </a:xfrm>
           <a:prstGeom prst="rect">
@@ -11941,7 +12060,7 @@
   <p:cSld>
     <p:spTree>
       <p:nvGrpSpPr>
-        <p:cNvPr id="168" name="Shape 168"/>
+        <p:cNvPr id="169" name="Shape 169"/>
         <p:cNvGrpSpPr/>
         <p:nvPr/>
       </p:nvGrpSpPr>
@@ -11955,7 +12074,7 @@
       </p:grpSpPr>
       <p:sp>
         <p:nvSpPr>
-          <p:cNvPr id="169" name="Google Shape;169;p26"/>
+          <p:cNvPr id="170" name="Google Shape;170;p26"/>
           <p:cNvSpPr txBox="1"/>
           <p:nvPr>
             <p:ph type="title"/>
@@ -11999,7 +12118,7 @@
       </p:sp>
       <p:pic>
         <p:nvPicPr>
-          <p:cNvPr id="170" name="Google Shape;170;p26"/>
+          <p:cNvPr id="171" name="Google Shape;171;p26"/>
           <p:cNvPicPr preferRelativeResize="0"/>
           <p:nvPr/>
         </p:nvPicPr>
@@ -12027,7 +12146,7 @@
       </p:pic>
       <p:pic>
         <p:nvPicPr>
-          <p:cNvPr id="171" name="Google Shape;171;p26" title="pngwing.com.png"/>
+          <p:cNvPr id="172" name="Google Shape;172;p26" title="pngwing.com.png"/>
           <p:cNvPicPr preferRelativeResize="0"/>
           <p:nvPr/>
         </p:nvPicPr>
@@ -12066,7 +12185,7 @@
   <p:cSld>
     <p:spTree>
       <p:nvGrpSpPr>
-        <p:cNvPr id="175" name="Shape 175"/>
+        <p:cNvPr id="176" name="Shape 176"/>
         <p:cNvGrpSpPr/>
         <p:nvPr/>
       </p:nvGrpSpPr>
@@ -12080,7 +12199,7 @@
       </p:grpSpPr>
       <p:sp>
         <p:nvSpPr>
-          <p:cNvPr id="176" name="Google Shape;176;p27"/>
+          <p:cNvPr id="177" name="Google Shape;177;p27"/>
           <p:cNvSpPr txBox="1"/>
           <p:nvPr/>
         </p:nvSpPr>
@@ -12150,7 +12269,7 @@
       </p:sp>
       <p:pic>
         <p:nvPicPr>
-          <p:cNvPr id="177" name="Google Shape;177;p27"/>
+          <p:cNvPr id="178" name="Google Shape;178;p27"/>
           <p:cNvPicPr preferRelativeResize="0"/>
           <p:nvPr/>
         </p:nvPicPr>
@@ -12178,7 +12297,7 @@
       </p:pic>
       <p:cxnSp>
         <p:nvCxnSpPr>
-          <p:cNvPr id="178" name="Google Shape;178;p27"/>
+          <p:cNvPr id="179" name="Google Shape;179;p27"/>
           <p:cNvCxnSpPr/>
           <p:nvPr/>
         </p:nvCxnSpPr>
@@ -12215,7 +12334,7 @@
   <p:cSld>
     <p:spTree>
       <p:nvGrpSpPr>
-        <p:cNvPr id="182" name="Shape 182"/>
+        <p:cNvPr id="183" name="Shape 183"/>
         <p:cNvGrpSpPr/>
         <p:nvPr/>
       </p:nvGrpSpPr>
@@ -12229,7 +12348,7 @@
       </p:grpSpPr>
       <p:sp>
         <p:nvSpPr>
-          <p:cNvPr id="183" name="Google Shape;183;p28"/>
+          <p:cNvPr id="184" name="Google Shape;184;p28"/>
           <p:cNvSpPr txBox="1"/>
           <p:nvPr>
             <p:ph type="title"/>
@@ -12269,7 +12388,7 @@
       </p:sp>
       <p:pic>
         <p:nvPicPr>
-          <p:cNvPr id="184" name="Google Shape;184;p28" title="Capture d’écran 2026-07-16 à 14.07.45.png"/>
+          <p:cNvPr id="185" name="Google Shape;185;p28" title="Capture d’écran 2026-07-16 à 14.07.45.png"/>
           <p:cNvPicPr preferRelativeResize="0"/>
           <p:nvPr/>
         </p:nvPicPr>
@@ -12297,7 +12416,7 @@
       </p:pic>
       <p:sp>
         <p:nvSpPr>
-          <p:cNvPr id="185" name="Google Shape;185;p28"/>
+          <p:cNvPr id="186" name="Google Shape;186;p28"/>
           <p:cNvSpPr/>
           <p:nvPr/>
         </p:nvSpPr>
@@ -12349,7 +12468,7 @@
       </p:sp>
       <p:sp>
         <p:nvSpPr>
-          <p:cNvPr id="186" name="Google Shape;186;p28"/>
+          <p:cNvPr id="187" name="Google Shape;187;p28"/>
           <p:cNvSpPr txBox="1"/>
           <p:nvPr/>
         </p:nvSpPr>
@@ -12407,7 +12526,7 @@
       </p:sp>
       <p:sp>
         <p:nvSpPr>
-          <p:cNvPr id="187" name="Google Shape;187;p28"/>
+          <p:cNvPr id="188" name="Google Shape;188;p28"/>
           <p:cNvSpPr/>
           <p:nvPr/>
         </p:nvSpPr>
@@ -12459,7 +12578,7 @@
       </p:sp>
       <p:sp>
         <p:nvSpPr>
-          <p:cNvPr id="188" name="Google Shape;188;p28"/>
+          <p:cNvPr id="189" name="Google Shape;189;p28"/>
           <p:cNvSpPr txBox="1"/>
           <p:nvPr/>
         </p:nvSpPr>
@@ -12517,7 +12636,7 @@
       </p:sp>
       <p:sp>
         <p:nvSpPr>
-          <p:cNvPr id="189" name="Google Shape;189;p28"/>
+          <p:cNvPr id="190" name="Google Shape;190;p28"/>
           <p:cNvSpPr/>
           <p:nvPr/>
         </p:nvSpPr>
@@ -12569,7 +12688,7 @@
       </p:sp>
       <p:sp>
         <p:nvSpPr>
-          <p:cNvPr id="190" name="Google Shape;190;p28"/>
+          <p:cNvPr id="191" name="Google Shape;191;p28"/>
           <p:cNvSpPr txBox="1"/>
           <p:nvPr/>
         </p:nvSpPr>
@@ -12627,14 +12746,14 @@
       </p:sp>
       <p:sp>
         <p:nvSpPr>
-          <p:cNvPr id="191" name="Google Shape;191;p28"/>
+          <p:cNvPr id="192" name="Google Shape;192;p28"/>
           <p:cNvSpPr/>
           <p:nvPr/>
         </p:nvSpPr>
         <p:spPr>
           <a:xfrm>
             <a:off x="321925" y="4269825"/>
-            <a:ext cx="2847300" cy="399900"/>
+            <a:ext cx="3349800" cy="399900"/>
           </a:xfrm>
           <a:prstGeom prst="rect">
             <a:avLst/>
@@ -12679,7 +12798,7 @@
       </p:sp>
       <p:sp>
         <p:nvSpPr>
-          <p:cNvPr id="192" name="Google Shape;192;p28"/>
+          <p:cNvPr id="193" name="Google Shape;193;p28"/>
           <p:cNvSpPr txBox="1"/>
           <p:nvPr/>
         </p:nvSpPr>
@@ -12737,7 +12856,7 @@
       </p:sp>
       <p:pic>
         <p:nvPicPr>
-          <p:cNvPr id="193" name="Google Shape;193;p28"/>
+          <p:cNvPr id="194" name="Google Shape;194;p28"/>
           <p:cNvPicPr preferRelativeResize="0"/>
           <p:nvPr/>
         </p:nvPicPr>
@@ -12776,7 +12895,7 @@
   <p:cSld>
     <p:spTree>
       <p:nvGrpSpPr>
-        <p:cNvPr id="197" name="Shape 197"/>
+        <p:cNvPr id="198" name="Shape 198"/>
         <p:cNvGrpSpPr/>
         <p:nvPr/>
       </p:nvGrpSpPr>
@@ -12790,7 +12909,7 @@
       </p:grpSpPr>
       <p:sp>
         <p:nvSpPr>
-          <p:cNvPr id="198" name="Google Shape;198;p29"/>
+          <p:cNvPr id="199" name="Google Shape;199;p29"/>
           <p:cNvSpPr txBox="1"/>
           <p:nvPr>
             <p:ph idx="2" type="body"/>
@@ -13026,7 +13145,7 @@
       </p:sp>
       <p:sp>
         <p:nvSpPr>
-          <p:cNvPr id="199" name="Google Shape;199;p29"/>
+          <p:cNvPr id="200" name="Google Shape;200;p29"/>
           <p:cNvSpPr txBox="1"/>
           <p:nvPr>
             <p:ph type="title"/>
@@ -13081,7 +13200,7 @@
       </p:sp>
       <p:pic>
         <p:nvPicPr>
-          <p:cNvPr id="200" name="Google Shape;200;p29" title="Capture d’écran 2026-07-16 à 14.08.00.png"/>
+          <p:cNvPr id="201" name="Google Shape;201;p29" title="Capture d’écran 2026-07-16 à 14.08.00.png"/>
           <p:cNvPicPr preferRelativeResize="0"/>
           <p:nvPr/>
         </p:nvPicPr>
@@ -13109,7 +13228,7 @@
       </p:pic>
       <p:pic>
         <p:nvPicPr>
-          <p:cNvPr id="201" name="Google Shape;201;p29"/>
+          <p:cNvPr id="202" name="Google Shape;202;p29"/>
           <p:cNvPicPr preferRelativeResize="0"/>
           <p:nvPr/>
         </p:nvPicPr>
@@ -13148,7 +13267,7 @@
   <p:cSld>
     <p:spTree>
       <p:nvGrpSpPr>
-        <p:cNvPr id="205" name="Shape 205"/>
+        <p:cNvPr id="206" name="Shape 206"/>
         <p:cNvGrpSpPr/>
         <p:nvPr/>
       </p:nvGrpSpPr>
@@ -13162,7 +13281,7 @@
       </p:grpSpPr>
       <p:sp>
         <p:nvSpPr>
-          <p:cNvPr id="206" name="Google Shape;206;p30"/>
+          <p:cNvPr id="207" name="Google Shape;207;p30"/>
           <p:cNvSpPr txBox="1"/>
           <p:nvPr>
             <p:ph type="title"/>
@@ -13213,7 +13332,7 @@
   <p:cSld>
     <p:spTree>
       <p:nvGrpSpPr>
-        <p:cNvPr id="210" name="Shape 210"/>
+        <p:cNvPr id="211" name="Shape 211"/>
         <p:cNvGrpSpPr/>
         <p:nvPr/>
       </p:nvGrpSpPr>
@@ -13227,7 +13346,7 @@
       </p:grpSpPr>
       <p:sp>
         <p:nvSpPr>
-          <p:cNvPr id="211" name="Google Shape;211;p31"/>
+          <p:cNvPr id="212" name="Google Shape;212;p31"/>
           <p:cNvSpPr txBox="1"/>
           <p:nvPr>
             <p:ph type="title"/>
@@ -13277,148 +13396,6 @@
               <a:t/>
             </a:r>
             <a:endParaRPr/>
-          </a:p>
-        </p:txBody>
-      </p:sp>
-      <p:sp>
-        <p:nvSpPr>
-          <p:cNvPr id="212" name="Google Shape;212;p31"/>
-          <p:cNvSpPr txBox="1"/>
-          <p:nvPr>
-            <p:ph idx="2" type="body"/>
-          </p:nvPr>
-        </p:nvSpPr>
-        <p:spPr>
-          <a:xfrm>
-            <a:off x="311700" y="1058225"/>
-            <a:ext cx="3828000" cy="3996600"/>
-          </a:xfrm>
-          <a:prstGeom prst="rect">
-            <a:avLst/>
-          </a:prstGeom>
-        </p:spPr>
-        <p:txBody>
-          <a:bodyPr anchorCtr="0" anchor="t" bIns="91425" lIns="91425" spcFirstLastPara="1" rIns="91425" wrap="square" tIns="91425">
-            <a:noAutofit/>
-          </a:bodyPr>
-          <a:lstStyle/>
-          <a:p>
-            <a:pPr indent="0" lvl="0" marL="0" rtl="0" algn="l">
-              <a:spcBef>
-                <a:spcPts val="0"/>
-              </a:spcBef>
-              <a:spcAft>
-                <a:spcPts val="0"/>
-              </a:spcAft>
-              <a:buNone/>
-            </a:pPr>
-            <a:r>
-              <a:rPr b="1" lang="fr" sz="1500"/>
-              <a:t>Factorisation des pipelines</a:t>
-            </a:r>
-            <a:r>
-              <a:rPr b="1" lang="fr" sz="1500"/>
-              <a:t> :</a:t>
-            </a:r>
-            <a:endParaRPr b="1" sz="1500"/>
-          </a:p>
-          <a:p>
-            <a:pPr indent="-323850" lvl="0" marL="457200" rtl="0" algn="l">
-              <a:spcBef>
-                <a:spcPts val="1600"/>
-              </a:spcBef>
-              <a:spcAft>
-                <a:spcPts val="0"/>
-              </a:spcAft>
-              <a:buSzPts val="1500"/>
-              <a:buChar char="●"/>
-            </a:pPr>
-            <a:r>
-              <a:rPr lang="fr" sz="1500"/>
-              <a:t>Dynamic Task Mapping</a:t>
-            </a:r>
-            <a:endParaRPr sz="1500"/>
-          </a:p>
-          <a:p>
-            <a:pPr indent="-323850" lvl="0" marL="457200" rtl="0" algn="l">
-              <a:spcBef>
-                <a:spcPts val="0"/>
-              </a:spcBef>
-              <a:spcAft>
-                <a:spcPts val="0"/>
-              </a:spcAft>
-              <a:buSzPts val="1500"/>
-              <a:buChar char="●"/>
-            </a:pPr>
-            <a:r>
-              <a:rPr lang="fr" sz="1500"/>
-              <a:t>Task group</a:t>
-            </a:r>
-            <a:endParaRPr sz="1500"/>
-          </a:p>
-          <a:p>
-            <a:pPr indent="-323850" lvl="0" marL="457200" rtl="0" algn="l">
-              <a:spcBef>
-                <a:spcPts val="0"/>
-              </a:spcBef>
-              <a:spcAft>
-                <a:spcPts val="0"/>
-              </a:spcAft>
-              <a:buSzPts val="1500"/>
-              <a:buChar char="●"/>
-            </a:pPr>
-            <a:r>
-              <a:rPr lang="fr" sz="1500"/>
-              <a:t>Duplication de tâches</a:t>
-            </a:r>
-            <a:endParaRPr sz="1500"/>
-          </a:p>
-          <a:p>
-            <a:pPr indent="-323850" lvl="0" marL="457200" rtl="0" algn="l">
-              <a:spcBef>
-                <a:spcPts val="0"/>
-              </a:spcBef>
-              <a:spcAft>
-                <a:spcPts val="0"/>
-              </a:spcAft>
-              <a:buSzPts val="1500"/>
-              <a:buChar char="●"/>
-            </a:pPr>
-            <a:r>
-              <a:rPr lang="fr" sz="1500"/>
-              <a:t>Appel manuels</a:t>
-            </a:r>
-            <a:endParaRPr sz="1500"/>
-          </a:p>
-          <a:p>
-            <a:pPr indent="0" lvl="0" marL="457200" rtl="0" algn="l">
-              <a:spcBef>
-                <a:spcPts val="1600"/>
-              </a:spcBef>
-              <a:spcAft>
-                <a:spcPts val="0"/>
-              </a:spcAft>
-              <a:buNone/>
-            </a:pPr>
-            <a:r>
-              <a:t/>
-            </a:r>
-            <a:endParaRPr sz="1300"/>
-          </a:p>
-          <a:p>
-            <a:pPr indent="0" lvl="0" marL="457200" rtl="0" algn="l">
-              <a:spcBef>
-                <a:spcPts val="1600"/>
-              </a:spcBef>
-              <a:spcAft>
-                <a:spcPts val="1600"/>
-              </a:spcAft>
-              <a:buNone/>
-            </a:pPr>
-            <a:r>
-              <a:t/>
-            </a:r>
-            <a:endParaRPr sz="1300"/>
           </a:p>
         </p:txBody>
       </p:sp>
@@ -13432,7 +13409,7 @@
         </p:nvSpPr>
         <p:spPr>
           <a:xfrm>
-            <a:off x="4950450" y="1146900"/>
+            <a:off x="311700" y="1058225"/>
             <a:ext cx="3828000" cy="3996600"/>
           </a:xfrm>
           <a:prstGeom prst="rect">
@@ -13456,6 +13433,148 @@
             </a:pPr>
             <a:r>
               <a:rPr b="1" lang="fr" sz="1500"/>
+              <a:t>Factorisation des pipelines</a:t>
+            </a:r>
+            <a:r>
+              <a:rPr b="1" lang="fr" sz="1500"/>
+              <a:t> :</a:t>
+            </a:r>
+            <a:endParaRPr b="1" sz="1500"/>
+          </a:p>
+          <a:p>
+            <a:pPr indent="-323850" lvl="0" marL="457200" rtl="0" algn="l">
+              <a:spcBef>
+                <a:spcPts val="1600"/>
+              </a:spcBef>
+              <a:spcAft>
+                <a:spcPts val="0"/>
+              </a:spcAft>
+              <a:buSzPts val="1500"/>
+              <a:buChar char="●"/>
+            </a:pPr>
+            <a:r>
+              <a:rPr lang="fr" sz="1500"/>
+              <a:t>Dynamic Task Mapping</a:t>
+            </a:r>
+            <a:endParaRPr sz="1500"/>
+          </a:p>
+          <a:p>
+            <a:pPr indent="-323850" lvl="0" marL="457200" rtl="0" algn="l">
+              <a:spcBef>
+                <a:spcPts val="0"/>
+              </a:spcBef>
+              <a:spcAft>
+                <a:spcPts val="0"/>
+              </a:spcAft>
+              <a:buSzPts val="1500"/>
+              <a:buChar char="●"/>
+            </a:pPr>
+            <a:r>
+              <a:rPr lang="fr" sz="1500"/>
+              <a:t>Task group</a:t>
+            </a:r>
+            <a:endParaRPr sz="1500"/>
+          </a:p>
+          <a:p>
+            <a:pPr indent="-323850" lvl="0" marL="457200" rtl="0" algn="l">
+              <a:spcBef>
+                <a:spcPts val="0"/>
+              </a:spcBef>
+              <a:spcAft>
+                <a:spcPts val="0"/>
+              </a:spcAft>
+              <a:buSzPts val="1500"/>
+              <a:buChar char="●"/>
+            </a:pPr>
+            <a:r>
+              <a:rPr lang="fr" sz="1500"/>
+              <a:t>Duplication des tâches</a:t>
+            </a:r>
+            <a:endParaRPr sz="1500"/>
+          </a:p>
+          <a:p>
+            <a:pPr indent="-323850" lvl="0" marL="457200" rtl="0" algn="l">
+              <a:spcBef>
+                <a:spcPts val="0"/>
+              </a:spcBef>
+              <a:spcAft>
+                <a:spcPts val="0"/>
+              </a:spcAft>
+              <a:buSzPts val="1500"/>
+              <a:buChar char="●"/>
+            </a:pPr>
+            <a:r>
+              <a:rPr lang="fr" sz="1500"/>
+              <a:t>Appel manuels</a:t>
+            </a:r>
+            <a:endParaRPr sz="1500"/>
+          </a:p>
+          <a:p>
+            <a:pPr indent="0" lvl="0" marL="457200" rtl="0" algn="l">
+              <a:spcBef>
+                <a:spcPts val="1600"/>
+              </a:spcBef>
+              <a:spcAft>
+                <a:spcPts val="0"/>
+              </a:spcAft>
+              <a:buNone/>
+            </a:pPr>
+            <a:r>
+              <a:t/>
+            </a:r>
+            <a:endParaRPr sz="1300"/>
+          </a:p>
+          <a:p>
+            <a:pPr indent="0" lvl="0" marL="457200" rtl="0" algn="l">
+              <a:spcBef>
+                <a:spcPts val="1600"/>
+              </a:spcBef>
+              <a:spcAft>
+                <a:spcPts val="1600"/>
+              </a:spcAft>
+              <a:buNone/>
+            </a:pPr>
+            <a:r>
+              <a:t/>
+            </a:r>
+            <a:endParaRPr sz="1300"/>
+          </a:p>
+        </p:txBody>
+      </p:sp>
+      <p:sp>
+        <p:nvSpPr>
+          <p:cNvPr id="214" name="Google Shape;214;p31"/>
+          <p:cNvSpPr txBox="1"/>
+          <p:nvPr>
+            <p:ph idx="2" type="body"/>
+          </p:nvPr>
+        </p:nvSpPr>
+        <p:spPr>
+          <a:xfrm>
+            <a:off x="4950450" y="1095925"/>
+            <a:ext cx="3828000" cy="3996600"/>
+          </a:xfrm>
+          <a:prstGeom prst="rect">
+            <a:avLst/>
+          </a:prstGeom>
+        </p:spPr>
+        <p:txBody>
+          <a:bodyPr anchorCtr="0" anchor="t" bIns="91425" lIns="91425" spcFirstLastPara="1" rIns="91425" wrap="square" tIns="91425">
+            <a:noAutofit/>
+          </a:bodyPr>
+          <a:lstStyle/>
+          <a:p>
+            <a:pPr indent="0" lvl="0" marL="0" rtl="0" algn="l">
+              <a:spcBef>
+                <a:spcPts val="0"/>
+              </a:spcBef>
+              <a:spcAft>
+                <a:spcPts val="0"/>
+              </a:spcAft>
+              <a:buNone/>
+            </a:pPr>
+            <a:r>
+              <a:rPr b="1" lang="fr" sz="1500"/>
               <a:t>Task groups</a:t>
             </a:r>
             <a:r>
@@ -13554,7 +13673,7 @@
       </p:sp>
       <p:pic>
         <p:nvPicPr>
-          <p:cNvPr id="214" name="Google Shape;214;p31"/>
+          <p:cNvPr id="215" name="Google Shape;215;p31"/>
           <p:cNvPicPr preferRelativeResize="0"/>
           <p:nvPr/>
         </p:nvPicPr>
@@ -13582,7 +13701,7 @@
       </p:pic>
       <p:pic>
         <p:nvPicPr>
-          <p:cNvPr id="215" name="Google Shape;215;p31"/>
+          <p:cNvPr id="216" name="Google Shape;216;p31"/>
           <p:cNvPicPr preferRelativeResize="0"/>
           <p:nvPr/>
         </p:nvPicPr>
@@ -13722,7 +13841,7 @@
         </p:nvSpPr>
         <p:spPr>
           <a:xfrm>
-            <a:off x="4939500" y="731764"/>
+            <a:off x="4939500" y="862914"/>
             <a:ext cx="3837000" cy="3695100"/>
           </a:xfrm>
           <a:prstGeom prst="rect">
@@ -13747,7 +13866,7 @@
             </a:pPr>
             <a:r>
               <a:rPr lang="fr" sz="1400"/>
-              <a:t>Objetif</a:t>
+              <a:t>Objectif</a:t>
             </a:r>
             <a:endParaRPr sz="1400"/>
           </a:p>
@@ -13940,7 +14059,7 @@
   <p:cSld>
     <p:spTree>
       <p:nvGrpSpPr>
-        <p:cNvPr id="219" name="Shape 219"/>
+        <p:cNvPr id="220" name="Shape 220"/>
         <p:cNvGrpSpPr/>
         <p:nvPr/>
       </p:nvGrpSpPr>
@@ -13954,7 +14073,7 @@
       </p:grpSpPr>
       <p:sp>
         <p:nvSpPr>
-          <p:cNvPr id="220" name="Google Shape;220;p32"/>
+          <p:cNvPr id="221" name="Google Shape;221;p32"/>
           <p:cNvSpPr txBox="1"/>
           <p:nvPr>
             <p:ph type="title"/>
@@ -14009,7 +14128,7 @@
       </p:sp>
       <p:sp>
         <p:nvSpPr>
-          <p:cNvPr id="221" name="Google Shape;221;p32"/>
+          <p:cNvPr id="222" name="Google Shape;222;p32"/>
           <p:cNvSpPr txBox="1"/>
           <p:nvPr>
             <p:ph idx="2" type="body"/>
@@ -14083,7 +14202,7 @@
       </p:sp>
       <p:pic>
         <p:nvPicPr>
-          <p:cNvPr id="222" name="Google Shape;222;p32"/>
+          <p:cNvPr id="223" name="Google Shape;223;p32"/>
           <p:cNvPicPr preferRelativeResize="0"/>
           <p:nvPr/>
         </p:nvPicPr>
@@ -14122,7 +14241,7 @@
   <p:cSld>
     <p:spTree>
       <p:nvGrpSpPr>
-        <p:cNvPr id="226" name="Shape 226"/>
+        <p:cNvPr id="227" name="Shape 227"/>
         <p:cNvGrpSpPr/>
         <p:nvPr/>
       </p:nvGrpSpPr>
@@ -14136,7 +14255,7 @@
       </p:grpSpPr>
       <p:sp>
         <p:nvSpPr>
-          <p:cNvPr id="227" name="Google Shape;227;p33"/>
+          <p:cNvPr id="228" name="Google Shape;228;p33"/>
           <p:cNvSpPr txBox="1"/>
           <p:nvPr>
             <p:ph type="title"/>
@@ -14191,7 +14310,7 @@
       </p:sp>
       <p:sp>
         <p:nvSpPr>
-          <p:cNvPr id="228" name="Google Shape;228;p33"/>
+          <p:cNvPr id="229" name="Google Shape;229;p33"/>
           <p:cNvSpPr txBox="1"/>
           <p:nvPr>
             <p:ph idx="2" type="body"/>
@@ -14285,7 +14404,7 @@
       </p:sp>
       <p:pic>
         <p:nvPicPr>
-          <p:cNvPr id="229" name="Google Shape;229;p33"/>
+          <p:cNvPr id="230" name="Google Shape;230;p33"/>
           <p:cNvPicPr preferRelativeResize="0"/>
           <p:nvPr/>
         </p:nvPicPr>
@@ -14324,7 +14443,7 @@
   <p:cSld>
     <p:spTree>
       <p:nvGrpSpPr>
-        <p:cNvPr id="233" name="Shape 233"/>
+        <p:cNvPr id="234" name="Shape 234"/>
         <p:cNvGrpSpPr/>
         <p:nvPr/>
       </p:nvGrpSpPr>
@@ -14338,7 +14457,7 @@
       </p:grpSpPr>
       <p:sp>
         <p:nvSpPr>
-          <p:cNvPr id="234" name="Google Shape;234;p34"/>
+          <p:cNvPr id="235" name="Google Shape;235;p34"/>
           <p:cNvSpPr txBox="1"/>
           <p:nvPr>
             <p:ph type="title"/>
@@ -14393,7 +14512,7 @@
       </p:sp>
       <p:sp>
         <p:nvSpPr>
-          <p:cNvPr id="235" name="Google Shape;235;p34"/>
+          <p:cNvPr id="236" name="Google Shape;236;p34"/>
           <p:cNvSpPr txBox="1"/>
           <p:nvPr>
             <p:ph idx="2" type="body"/>
@@ -14483,7 +14602,7 @@
       </p:sp>
       <p:pic>
         <p:nvPicPr>
-          <p:cNvPr id="236" name="Google Shape;236;p34"/>
+          <p:cNvPr id="237" name="Google Shape;237;p34"/>
           <p:cNvPicPr preferRelativeResize="0"/>
           <p:nvPr/>
         </p:nvPicPr>
@@ -14522,7 +14641,7 @@
   <p:cSld>
     <p:spTree>
       <p:nvGrpSpPr>
-        <p:cNvPr id="240" name="Shape 240"/>
+        <p:cNvPr id="241" name="Shape 241"/>
         <p:cNvGrpSpPr/>
         <p:nvPr/>
       </p:nvGrpSpPr>
@@ -14536,7 +14655,7 @@
       </p:grpSpPr>
       <p:sp>
         <p:nvSpPr>
-          <p:cNvPr id="241" name="Google Shape;241;p35"/>
+          <p:cNvPr id="242" name="Google Shape;242;p35"/>
           <p:cNvSpPr txBox="1"/>
           <p:nvPr>
             <p:ph type="title"/>
@@ -14587,7 +14706,7 @@
   <p:cSld>
     <p:spTree>
       <p:nvGrpSpPr>
-        <p:cNvPr id="245" name="Shape 245"/>
+        <p:cNvPr id="246" name="Shape 246"/>
         <p:cNvGrpSpPr/>
         <p:nvPr/>
       </p:nvGrpSpPr>
@@ -14601,7 +14720,7 @@
       </p:grpSpPr>
       <p:sp>
         <p:nvSpPr>
-          <p:cNvPr id="246" name="Google Shape;246;p36"/>
+          <p:cNvPr id="247" name="Google Shape;247;p36"/>
           <p:cNvSpPr txBox="1"/>
           <p:nvPr>
             <p:ph type="title"/>
@@ -14656,7 +14775,7 @@
       </p:sp>
       <p:sp>
         <p:nvSpPr>
-          <p:cNvPr id="247" name="Google Shape;247;p36"/>
+          <p:cNvPr id="248" name="Google Shape;248;p36"/>
           <p:cNvSpPr txBox="1"/>
           <p:nvPr/>
         </p:nvSpPr>
@@ -15891,7 +16010,7 @@
       </p:sp>
       <p:sp>
         <p:nvSpPr>
-          <p:cNvPr id="248" name="Google Shape;248;p36"/>
+          <p:cNvPr id="249" name="Google Shape;249;p36"/>
           <p:cNvSpPr txBox="1"/>
           <p:nvPr/>
         </p:nvSpPr>
@@ -16588,7 +16707,7 @@
       </p:sp>
       <p:pic>
         <p:nvPicPr>
-          <p:cNvPr id="249" name="Google Shape;249;p36"/>
+          <p:cNvPr id="250" name="Google Shape;250;p36"/>
           <p:cNvPicPr preferRelativeResize="0"/>
           <p:nvPr/>
         </p:nvPicPr>
@@ -16627,7 +16746,7 @@
   <p:cSld>
     <p:spTree>
       <p:nvGrpSpPr>
-        <p:cNvPr id="253" name="Shape 253"/>
+        <p:cNvPr id="254" name="Shape 254"/>
         <p:cNvGrpSpPr/>
         <p:nvPr/>
       </p:nvGrpSpPr>
@@ -16641,7 +16760,7 @@
       </p:grpSpPr>
       <p:sp>
         <p:nvSpPr>
-          <p:cNvPr id="254" name="Google Shape;254;p37"/>
+          <p:cNvPr id="255" name="Google Shape;255;p37"/>
           <p:cNvSpPr txBox="1"/>
           <p:nvPr>
             <p:ph type="title"/>
@@ -16692,7 +16811,7 @@
   <p:cSld>
     <p:spTree>
       <p:nvGrpSpPr>
-        <p:cNvPr id="258" name="Shape 258"/>
+        <p:cNvPr id="259" name="Shape 259"/>
         <p:cNvGrpSpPr/>
         <p:nvPr/>
       </p:nvGrpSpPr>
@@ -16706,7 +16825,7 @@
       </p:grpSpPr>
       <p:sp>
         <p:nvSpPr>
-          <p:cNvPr id="259" name="Google Shape;259;p38"/>
+          <p:cNvPr id="260" name="Google Shape;260;p38"/>
           <p:cNvSpPr txBox="1"/>
           <p:nvPr>
             <p:ph type="title"/>
@@ -16761,7 +16880,7 @@
       </p:sp>
       <p:pic>
         <p:nvPicPr>
-          <p:cNvPr id="260" name="Google Shape;260;p38" title="Capture d’écran 2026-07-16 à 14.29.32.png"/>
+          <p:cNvPr id="261" name="Google Shape;261;p38" title="Capture d’écran 2026-07-16 à 14.29.32.png"/>
           <p:cNvPicPr preferRelativeResize="0"/>
           <p:nvPr/>
         </p:nvPicPr>
@@ -16789,61 +16908,6 @@
       </p:pic>
       <p:sp>
         <p:nvSpPr>
-          <p:cNvPr id="261" name="Google Shape;261;p38"/>
-          <p:cNvSpPr txBox="1"/>
-          <p:nvPr>
-            <p:ph idx="1" type="body"/>
-          </p:nvPr>
-        </p:nvSpPr>
-        <p:spPr>
-          <a:xfrm>
-            <a:off x="133475" y="1058225"/>
-            <a:ext cx="3999900" cy="541500"/>
-          </a:xfrm>
-          <a:prstGeom prst="rect">
-            <a:avLst/>
-          </a:prstGeom>
-        </p:spPr>
-        <p:txBody>
-          <a:bodyPr anchorCtr="0" anchor="t" bIns="91425" lIns="91425" spcFirstLastPara="1" rIns="91425" wrap="square" tIns="91425">
-            <a:noAutofit/>
-          </a:bodyPr>
-          <a:lstStyle/>
-          <a:p>
-            <a:pPr indent="0" lvl="0" marL="0" rtl="0" algn="l">
-              <a:spcBef>
-                <a:spcPts val="0"/>
-              </a:spcBef>
-              <a:spcAft>
-                <a:spcPts val="0"/>
-              </a:spcAft>
-              <a:buNone/>
-            </a:pPr>
-            <a:r>
-              <a:rPr b="1" lang="fr" sz="1800"/>
-              <a:t>Test unitaires</a:t>
-            </a:r>
-            <a:endParaRPr b="1" sz="1800"/>
-          </a:p>
-          <a:p>
-            <a:pPr indent="0" lvl="0" marL="0" rtl="0" algn="l">
-              <a:spcBef>
-                <a:spcPts val="1600"/>
-              </a:spcBef>
-              <a:spcAft>
-                <a:spcPts val="1600"/>
-              </a:spcAft>
-              <a:buNone/>
-            </a:pPr>
-            <a:r>
-              <a:t/>
-            </a:r>
-            <a:endParaRPr sz="1600"/>
-          </a:p>
-        </p:txBody>
-      </p:sp>
-      <p:sp>
-        <p:nvSpPr>
           <p:cNvPr id="262" name="Google Shape;262;p38"/>
           <p:cNvSpPr txBox="1"/>
           <p:nvPr>
@@ -16852,7 +16916,7 @@
         </p:nvSpPr>
         <p:spPr>
           <a:xfrm>
-            <a:off x="4780525" y="1058225"/>
+            <a:off x="133475" y="1058225"/>
             <a:ext cx="3999900" cy="541500"/>
           </a:xfrm>
           <a:prstGeom prst="rect">
@@ -16876,6 +16940,61 @@
             </a:pPr>
             <a:r>
               <a:rPr b="1" lang="fr" sz="1800"/>
+              <a:t>Test unitaires</a:t>
+            </a:r>
+            <a:endParaRPr b="1" sz="1800"/>
+          </a:p>
+          <a:p>
+            <a:pPr indent="0" lvl="0" marL="0" rtl="0" algn="l">
+              <a:spcBef>
+                <a:spcPts val="1600"/>
+              </a:spcBef>
+              <a:spcAft>
+                <a:spcPts val="1600"/>
+              </a:spcAft>
+              <a:buNone/>
+            </a:pPr>
+            <a:r>
+              <a:t/>
+            </a:r>
+            <a:endParaRPr sz="1600"/>
+          </a:p>
+        </p:txBody>
+      </p:sp>
+      <p:sp>
+        <p:nvSpPr>
+          <p:cNvPr id="263" name="Google Shape;263;p38"/>
+          <p:cNvSpPr txBox="1"/>
+          <p:nvPr>
+            <p:ph idx="1" type="body"/>
+          </p:nvPr>
+        </p:nvSpPr>
+        <p:spPr>
+          <a:xfrm>
+            <a:off x="4780525" y="1058225"/>
+            <a:ext cx="3999900" cy="541500"/>
+          </a:xfrm>
+          <a:prstGeom prst="rect">
+            <a:avLst/>
+          </a:prstGeom>
+        </p:spPr>
+        <p:txBody>
+          <a:bodyPr anchorCtr="0" anchor="t" bIns="91425" lIns="91425" spcFirstLastPara="1" rIns="91425" wrap="square" tIns="91425">
+            <a:noAutofit/>
+          </a:bodyPr>
+          <a:lstStyle/>
+          <a:p>
+            <a:pPr indent="0" lvl="0" marL="0" rtl="0" algn="l">
+              <a:spcBef>
+                <a:spcPts val="0"/>
+              </a:spcBef>
+              <a:spcAft>
+                <a:spcPts val="0"/>
+              </a:spcAft>
+              <a:buNone/>
+            </a:pPr>
+            <a:r>
+              <a:rPr b="1" lang="fr" sz="1800"/>
               <a:t>Build image</a:t>
             </a:r>
             <a:endParaRPr b="1" sz="1800"/>
@@ -16899,7 +17018,7 @@
       </p:sp>
       <p:pic>
         <p:nvPicPr>
-          <p:cNvPr id="263" name="Google Shape;263;p38"/>
+          <p:cNvPr id="264" name="Google Shape;264;p38"/>
           <p:cNvPicPr preferRelativeResize="0"/>
           <p:nvPr/>
         </p:nvPicPr>
@@ -16927,7 +17046,7 @@
       </p:pic>
       <p:pic>
         <p:nvPicPr>
-          <p:cNvPr id="264" name="Google Shape;264;p38"/>
+          <p:cNvPr id="265" name="Google Shape;265;p38"/>
           <p:cNvPicPr preferRelativeResize="0"/>
           <p:nvPr/>
         </p:nvPicPr>
@@ -16966,7 +17085,7 @@
   <p:cSld>
     <p:spTree>
       <p:nvGrpSpPr>
-        <p:cNvPr id="268" name="Shape 268"/>
+        <p:cNvPr id="269" name="Shape 269"/>
         <p:cNvGrpSpPr/>
         <p:nvPr/>
       </p:nvGrpSpPr>
@@ -16980,7 +17099,7 @@
       </p:grpSpPr>
       <p:sp>
         <p:nvSpPr>
-          <p:cNvPr id="269" name="Google Shape;269;p39"/>
+          <p:cNvPr id="270" name="Google Shape;270;p39"/>
           <p:cNvSpPr txBox="1"/>
           <p:nvPr>
             <p:ph type="title"/>
@@ -17031,7 +17150,7 @@
   <p:cSld>
     <p:spTree>
       <p:nvGrpSpPr>
-        <p:cNvPr id="273" name="Shape 273"/>
+        <p:cNvPr id="274" name="Shape 274"/>
         <p:cNvGrpSpPr/>
         <p:nvPr/>
       </p:nvGrpSpPr>
@@ -17045,7 +17164,7 @@
       </p:grpSpPr>
       <p:sp>
         <p:nvSpPr>
-          <p:cNvPr id="274" name="Google Shape;274;p40"/>
+          <p:cNvPr id="275" name="Google Shape;275;p40"/>
           <p:cNvSpPr txBox="1"/>
           <p:nvPr>
             <p:ph type="title"/>
@@ -17100,7 +17219,7 @@
       </p:sp>
       <p:pic>
         <p:nvPicPr>
-          <p:cNvPr id="275" name="Google Shape;275;p40"/>
+          <p:cNvPr id="276" name="Google Shape;276;p40"/>
           <p:cNvPicPr preferRelativeResize="0"/>
           <p:nvPr/>
         </p:nvPicPr>
@@ -17128,7 +17247,7 @@
       </p:pic>
       <p:pic>
         <p:nvPicPr>
-          <p:cNvPr id="276" name="Google Shape;276;p40"/>
+          <p:cNvPr id="277" name="Google Shape;277;p40"/>
           <p:cNvPicPr preferRelativeResize="0"/>
           <p:nvPr/>
         </p:nvPicPr>
@@ -17167,7 +17286,7 @@
   <p:cSld>
     <p:spTree>
       <p:nvGrpSpPr>
-        <p:cNvPr id="280" name="Shape 280"/>
+        <p:cNvPr id="281" name="Shape 281"/>
         <p:cNvGrpSpPr/>
         <p:nvPr/>
       </p:nvGrpSpPr>
@@ -17181,7 +17300,7 @@
       </p:grpSpPr>
       <p:sp>
         <p:nvSpPr>
-          <p:cNvPr id="281" name="Google Shape;281;p41"/>
+          <p:cNvPr id="282" name="Google Shape;282;p41"/>
           <p:cNvSpPr txBox="1"/>
           <p:nvPr>
             <p:ph type="title"/>
@@ -17721,7 +17840,7 @@
   <p:cSld>
     <p:spTree>
       <p:nvGrpSpPr>
-        <p:cNvPr id="285" name="Shape 285"/>
+        <p:cNvPr id="286" name="Shape 286"/>
         <p:cNvGrpSpPr/>
         <p:nvPr/>
       </p:nvGrpSpPr>
@@ -17735,7 +17854,7 @@
       </p:grpSpPr>
       <p:sp>
         <p:nvSpPr>
-          <p:cNvPr id="286" name="Google Shape;286;p42"/>
+          <p:cNvPr id="287" name="Google Shape;287;p42"/>
           <p:cNvSpPr txBox="1"/>
           <p:nvPr>
             <p:ph type="title"/>
@@ -17790,7 +17909,7 @@
       </p:sp>
       <p:pic>
         <p:nvPicPr>
-          <p:cNvPr id="287" name="Google Shape;287;p42"/>
+          <p:cNvPr id="288" name="Google Shape;288;p42"/>
           <p:cNvPicPr preferRelativeResize="0"/>
           <p:nvPr/>
         </p:nvPicPr>
@@ -17818,7 +17937,7 @@
       </p:pic>
       <p:pic>
         <p:nvPicPr>
-          <p:cNvPr id="288" name="Google Shape;288;p42"/>
+          <p:cNvPr id="289" name="Google Shape;289;p42"/>
           <p:cNvPicPr preferRelativeResize="0"/>
           <p:nvPr/>
         </p:nvPicPr>
@@ -17857,7 +17976,7 @@
   <p:cSld>
     <p:spTree>
       <p:nvGrpSpPr>
-        <p:cNvPr id="292" name="Shape 292"/>
+        <p:cNvPr id="293" name="Shape 293"/>
         <p:cNvGrpSpPr/>
         <p:nvPr/>
       </p:nvGrpSpPr>
@@ -17871,7 +17990,7 @@
       </p:grpSpPr>
       <p:sp>
         <p:nvSpPr>
-          <p:cNvPr id="293" name="Google Shape;293;p43"/>
+          <p:cNvPr id="294" name="Google Shape;294;p43"/>
           <p:cNvSpPr txBox="1"/>
           <p:nvPr>
             <p:ph type="title"/>
@@ -17922,7 +18041,7 @@
   <p:cSld>
     <p:spTree>
       <p:nvGrpSpPr>
-        <p:cNvPr id="297" name="Shape 297"/>
+        <p:cNvPr id="298" name="Shape 298"/>
         <p:cNvGrpSpPr/>
         <p:nvPr/>
       </p:nvGrpSpPr>
@@ -17936,7 +18055,7 @@
       </p:grpSpPr>
       <p:sp>
         <p:nvSpPr>
-          <p:cNvPr id="298" name="Google Shape;298;p44"/>
+          <p:cNvPr id="299" name="Google Shape;299;p44"/>
           <p:cNvSpPr txBox="1"/>
           <p:nvPr>
             <p:ph type="title"/>
@@ -17976,7 +18095,7 @@
       </p:sp>
       <p:sp>
         <p:nvSpPr>
-          <p:cNvPr id="299" name="Google Shape;299;p44"/>
+          <p:cNvPr id="300" name="Google Shape;300;p44"/>
           <p:cNvSpPr txBox="1"/>
           <p:nvPr/>
         </p:nvSpPr>
@@ -18821,7 +18940,7 @@
                 <a:cs typeface="Old Standard TT"/>
                 <a:sym typeface="Old Standard TT"/>
               </a:rPr>
-              <a:t>des services externs</a:t>
+              <a:t>des services externes</a:t>
             </a:r>
             <a:endParaRPr sz="1800">
               <a:solidFill>
